--- a/public/materialy/1L/6/Prezentace k hodinám/5. Vektorová značka v Inkscapu.pptx
+++ b/public/materialy/1L/6/Prezentace k hodinám/5. Vektorová značka v Inkscapu.pptx
@@ -6385,7 +6385,7 @@
                 </a:solidFill>
                 <a:latin typeface="Calibri"/>
               </a:rPr>
-              <a:t>Plátno 800 × 800 px, jen základní tvary, nejvýše tři barvy.</a:t>
+              <a:t>Napiš, pro jaký klub je. 800 × 800 px, základní tvary, nejvýše tři barvy.</a:t>
             </a:r>
           </a:p>
         </p:txBody>
